--- a/submissions/Legacy Trust Reccomendations (1).pptx
+++ b/submissions/Legacy Trust Reccomendations (1).pptx
@@ -929,7 +929,55 @@
                   <a:schemeClr val="dk1"/>
                 </a:solidFill>
               </a:rPr>
-              <a:t>OPP-01, OPP-03, and OPP-05</a:t>
+              <a:t>OPP-01 </a:t>
+            </a:r>
+            <a:r>
+              <a:rPr lang="en-GB">
+                <a:solidFill>
+                  <a:schemeClr val="dk1"/>
+                </a:solidFill>
+              </a:rPr>
+              <a:t>(automate status checks) </a:t>
+            </a:r>
+            <a:r>
+              <a:rPr b="1" lang="en-GB">
+                <a:solidFill>
+                  <a:schemeClr val="dk1"/>
+                </a:solidFill>
+              </a:rPr>
+              <a:t>, OPP-03 (a</a:t>
+            </a:r>
+            <a:r>
+              <a:rPr lang="en-GB" sz="1000">
+                <a:solidFill>
+                  <a:schemeClr val="dk1"/>
+                </a:solidFill>
+              </a:rPr>
+              <a:t>tomate analytics and end of month reporting</a:t>
+            </a:r>
+            <a:r>
+              <a:rPr b="1" lang="en-GB">
+                <a:solidFill>
+                  <a:schemeClr val="dk1"/>
+                </a:solidFill>
+              </a:rPr>
+              <a:t>,) and OPP-05 </a:t>
+            </a:r>
+            <a:r>
+              <a:rPr lang="en-GB">
+                <a:solidFill>
+                  <a:schemeClr val="dk1"/>
+                </a:solidFill>
+              </a:rPr>
+              <a:t>(</a:t>
+            </a:r>
+            <a:r>
+              <a:rPr lang="en-GB" sz="1000">
+                <a:solidFill>
+                  <a:schemeClr val="dk1"/>
+                </a:solidFill>
+              </a:rPr>
+              <a:t>Automate the scheduling of follow ups with agents).</a:t>
             </a:r>
             <a:r>
               <a:rPr lang="en-GB">
@@ -969,7 +1017,7 @@
                   <a:schemeClr val="dk1"/>
                 </a:solidFill>
               </a:rPr>
-              <a:t>Let's look at what this investment achieves across our four core pillars:</a:t>
+              <a:t>Let's look at what this investment achieves:</a:t>
             </a:r>
             <a:endParaRPr>
               <a:solidFill>
@@ -1008,7 +1056,39 @@
                   <a:schemeClr val="dk1"/>
                 </a:solidFill>
               </a:rPr>
-              <a:t> This bundle directly targets and eliminates the manual administrative bottlenecks currently choking Gareth’s team. By automating routine, low-complexity customer status inquiries and follow-up tracking, we hand thousands of hours of capacity back to our skilled agents.</a:t>
+              <a:t> This bundle targets bottlenecks caused by the volume of manual </a:t>
+            </a:r>
+            <a:r>
+              <a:rPr lang="en-GB">
+                <a:solidFill>
+                  <a:schemeClr val="dk1"/>
+                </a:solidFill>
+              </a:rPr>
+              <a:t>administration</a:t>
+            </a:r>
+            <a:r>
+              <a:rPr lang="en-GB">
+                <a:solidFill>
+                  <a:schemeClr val="dk1"/>
+                </a:solidFill>
+              </a:rPr>
+              <a:t> faced by Gareth’s team. By automating customer status inquiries and follow-up tracking, we free up thousands of hours of capacity which agents can use to </a:t>
+            </a:r>
+            <a:r>
+              <a:rPr lang="en-GB">
+                <a:solidFill>
+                  <a:schemeClr val="dk1"/>
+                </a:solidFill>
+              </a:rPr>
+              <a:t>address</a:t>
+            </a:r>
+            <a:r>
+              <a:rPr lang="en-GB">
+                <a:solidFill>
+                  <a:schemeClr val="dk1"/>
+                </a:solidFill>
+              </a:rPr>
+              <a:t> the cases that really need them.</a:t>
             </a:r>
             <a:endParaRPr>
               <a:solidFill>
@@ -1047,7 +1127,7 @@
                   <a:schemeClr val="dk1"/>
                 </a:solidFill>
               </a:rPr>
-              <a:t> This is a highly profitable deployment. Phase 1 requires a total implementation cost of </a:t>
+              <a:t> This deployment is highly profitable. Phase 1 requires a total implementation cost of </a:t>
             </a:r>
             <a:r>
               <a:rPr b="1" lang="en-GB">
@@ -1063,7 +1143,7 @@
                   <a:schemeClr val="dk1"/>
                 </a:solidFill>
               </a:rPr>
-              <a:t>, but it will generate a gross annual benefit of </a:t>
+              <a:t>, but it should generate a gross annual benefit of </a:t>
             </a:r>
             <a:r>
               <a:rPr b="1" lang="en-GB">
@@ -1079,7 +1159,7 @@
                   <a:schemeClr val="dk1"/>
                 </a:solidFill>
               </a:rPr>
-              <a:t>. This leaves the bank with a net annual pocketed profit of </a:t>
+              <a:t>. This means the net annual profit will be </a:t>
             </a:r>
             <a:r>
               <a:rPr b="1" lang="en-GB">
@@ -1095,7 +1175,7 @@
                   <a:schemeClr val="dk1"/>
                 </a:solidFill>
               </a:rPr>
-              <a:t> in its very first year.</a:t>
+              <a:t> in the very first year.</a:t>
             </a:r>
             <a:endParaRPr>
               <a:solidFill>
@@ -1134,39 +1214,7 @@
                   <a:schemeClr val="dk1"/>
                 </a:solidFill>
               </a:rPr>
-              <a:t> I know there are valid concerns regarding OPP-03's standalone financial return of </a:t>
-            </a:r>
-            <a:r>
-              <a:rPr b="1" lang="en-GB">
-                <a:solidFill>
-                  <a:schemeClr val="dk1"/>
-                </a:solidFill>
-              </a:rPr>
-              <a:t>-£5,920.88</a:t>
-            </a:r>
-            <a:r>
-              <a:rPr lang="en-GB">
-                <a:solidFill>
-                  <a:schemeClr val="dk1"/>
-                </a:solidFill>
-              </a:rPr>
-              <a:t>. However, we have intentionally bundled it here as a strategic necessity. It builds the immutable data logging and audit trails mandated by UK FCA guidelines. Leaving it out to save a few thousand pounds exposes the bank to catastrophic compliance fines that could easily reach hundreds of thousands of pounds. Because OPP-05 is an absolute powerhouse—yielding a </a:t>
-            </a:r>
-            <a:r>
-              <a:rPr b="1" lang="en-GB">
-                <a:solidFill>
-                  <a:schemeClr val="dk1"/>
-                </a:solidFill>
-              </a:rPr>
-              <a:t>150.78% ROI</a:t>
-            </a:r>
-            <a:r>
-              <a:rPr lang="en-GB">
-                <a:solidFill>
-                  <a:schemeClr val="dk1"/>
-                </a:solidFill>
-              </a:rPr>
-              <a:t>—it completely absorbs the cost of our analytics framework, buying us full compliance safety for free.</a:t>
+              <a:t> OPP-03 is strategically necessary as it builds the data log and audit trails mandated by UK FCA guidelines. Without it we would be exposing the bank to catastrophic compliance fines that could easily reach hundreds of thousands of pounds.</a:t>
             </a:r>
             <a:endParaRPr>
               <a:solidFill>
@@ -1329,7 +1377,23 @@
                   <a:schemeClr val="dk1"/>
                 </a:solidFill>
               </a:rPr>
-              <a:t>Right now, our collections team is hemorrhaging 2,391.80 hours of manual work every single year just processing basic administrative tasks. At our baseline agent costs, that equates to an annual financial burden of £52,619.60 down the drain on routine administration rather than high-value customer negotiations.</a:t>
+              <a:t>Right now, our collections team is </a:t>
+            </a:r>
+            <a:r>
+              <a:rPr lang="en-GB">
+                <a:solidFill>
+                  <a:schemeClr val="dk1"/>
+                </a:solidFill>
+              </a:rPr>
+              <a:t>losing</a:t>
+            </a:r>
+            <a:r>
+              <a:rPr lang="en-GB">
+                <a:solidFill>
+                  <a:schemeClr val="dk1"/>
+                </a:solidFill>
+              </a:rPr>
+              <a:t> 2,391.80 hours of manual work every single year just processing basic administrative tasks. At our baseline agent cost, that equates  £52,619.60 annually wasted on routine administration rather than high-value customer negotiations.</a:t>
             </a:r>
             <a:endParaRPr>
               <a:solidFill>
@@ -1361,7 +1425,7 @@
                   <a:schemeClr val="dk1"/>
                 </a:solidFill>
               </a:rPr>
-              <a:t>Worse still, because our agents are completely buried under this administrative debt, we are experiencing an extra £10,617.37 in direct revenue leakage annually. This happens because active payment arrangements quietly collapse in the background, and we lack the capacity to follow up. When you look at the breakdown, OPP-01 status checks consume nearly 1,270 hours, and OPP-05 manual tracking takes up over 1,120 hours. We are paying our team to be data entry messengers, not collections experts.</a:t>
+              <a:t>Worse still, because our agents are completely buried under this administrative work, we are experiencing an extra £10,617.37 in direct revenue leakage annually. This is because active payment arrangements quietly collapse in the background, and we lack the capacity to follow this up. When you look at the breakdown, OPP-01 status checks consume nearly 1,270 hours, and OPP-05 manual tracking takes up over 1,120 hours. This means the team are being paid to be data entry messengers, not collections experts.</a:t>
             </a:r>
             <a:endParaRPr>
               <a:solidFill>
@@ -1524,7 +1588,23 @@
                   <a:schemeClr val="dk1"/>
                 </a:solidFill>
               </a:rPr>
-              <a:t>First, we have severe information asymmetry. Customers have zero self-service visibility, forcing them to call our queues just to check their balance. Second, we suffer from a 'Follow-Up Black Hole'. When a customer breaks a promise to pay, it falls through the cracks because there is no automated trigger to prompt an agent.</a:t>
+              <a:t>First, we have severe lack of easily </a:t>
+            </a:r>
+            <a:r>
+              <a:rPr lang="en-GB">
+                <a:solidFill>
+                  <a:schemeClr val="dk1"/>
+                </a:solidFill>
+              </a:rPr>
+              <a:t>available</a:t>
+            </a:r>
+            <a:r>
+              <a:rPr lang="en-GB">
+                <a:solidFill>
+                  <a:schemeClr val="dk1"/>
+                </a:solidFill>
+              </a:rPr>
+              <a:t> information. Customers have no self-service visibility, forcing them to call up just to check their balance. Second, we suffer from a 'Follow-Up Black Hole'. This means when a customer breaks a promise to pay, it gets lost in the system as there is no automated trigger to prompt an agent.</a:t>
             </a:r>
             <a:endParaRPr>
               <a:solidFill>
@@ -1556,7 +1636,7 @@
                   <a:schemeClr val="dk1"/>
                 </a:solidFill>
               </a:rPr>
-              <a:t>Finally, the technical reality is that our team is surviving on fragmented, manual spreadsheets. This leaves us with zero audit trails, putting us in a highly precarious regulatory position. Our user research confirms that both our customers and our staff are crying out for a secure, identity-verified portal to systematically handle these routine interactions.</a:t>
+              <a:t>The final friction point is that our team is surviving on fragmented, manual spreadsheets. This leaves us with no audit trails, which puts us in a precarious regulatory position. Our user research confirms that both our customers and our staff are crying out for a secure, identity-verified portal to handle these routine interactions.</a:t>
             </a:r>
             <a:endParaRPr>
               <a:solidFill>
@@ -1709,7 +1789,7 @@
                   <a:schemeClr val="dk1"/>
                 </a:solidFill>
               </a:rPr>
-              <a:t>We are requesting a total Phase 1 implementation investment of £42,320.00. This bundle will deliver an annual benefit of £66,756.09, resulting in a net 12-month value of +£24,436.09 and a portfolio ROI of 57.74%.</a:t>
+              <a:t>To implement phase 1 we require an investment of £42,320.00. This bundle will deliver an annual benefit of £66,756.09, resulting in a net 12-month value of +£24,436.09 and a ROI of 57.74%.</a:t>
             </a:r>
             <a:endParaRPr>
               <a:solidFill>
@@ -1736,23 +1816,7 @@
                   <a:schemeClr val="dk1"/>
                 </a:solidFill>
               </a:rPr>
-              <a:t>Now, I want to address the elephant in the room: OPP-03, our End-of-Month Analytics module, shows a standalone net loss of -£5,920.88. In a vacuum, you would cut this. However, we have intentionally bundled it into Phase 1 because it builds the core data foundation Daniel needs for risk auditing. </a:t>
-            </a:r>
-            <a:r>
-              <a:rPr b="1" lang="en-GB">
-                <a:solidFill>
-                  <a:schemeClr val="dk1"/>
-                </a:solidFill>
-              </a:rPr>
-              <a:t>To put this in perspective, non-compliance with UK FCA data rules can easily result in regulatory fines starting at hundreds of thousands of pounds, completely dwarfing our minor software deficit.</a:t>
-            </a:r>
-            <a:r>
-              <a:rPr lang="en-GB">
-                <a:solidFill>
-                  <a:schemeClr val="dk1"/>
-                </a:solidFill>
-              </a:rPr>
-              <a:t> Because OPP-05 is an operational powerhouse—yielding a massive 150.78% ROI—it completely absorbs the cost of our analytics framework, keeping the phase highly profitable while building an ironclad shield against regulatory penalties.</a:t>
+              <a:t>Regarding OPP-03, our End-of-Month Analytics module, this shows a net loss of -£5,920.88. In a vacuum, we might cut this. However, we have intentionally bundled it into Phase 1 because it builds the foundation of data Daniel needs for risk auditing. Because OPP-05 is highly profitable with a 150.78% ROI, it completely absorbs the cost of our analytics framework, keeping the phase profitable whilst shielding the bank against regulatory penalties.</a:t>
             </a:r>
             <a:endParaRPr>
               <a:solidFill>
@@ -1942,7 +2006,7 @@
                   <a:schemeClr val="dk1"/>
                 </a:solidFill>
               </a:rPr>
-              <a:t>In-scope capabilities include the core MFA Login Gate, featuring an FCA compliance guardrail that locks an account after 3 failed attempts and alerts Gareth’s team. We are also funding the read-only Account Dashboard and the Promise to Pay setup, which contains an affordability guardrail to instantly flag and escalate cases if a proposed plan exceeds a customer's logged income.</a:t>
+              <a:t>In-scope capabilities include the core MFA Login Gate, featuring an FCA compliance guardrail that will lock accounts after 3 failed attempts and alerts Gareth’s team. We are also funding the read-only Account Dashboard and the Promise to Pay setup, which contains an affordability guardrail to instantly flag and escalate cases if a proposed plan exceeds a customer's logged income.</a:t>
             </a:r>
             <a:endParaRPr>
               <a:solidFill>
@@ -1974,7 +2038,7 @@
                   <a:schemeClr val="dk1"/>
                 </a:solidFill>
               </a:rPr>
-              <a:t>Crucially, what we are </a:t>
+              <a:t>What we are </a:t>
             </a:r>
             <a:r>
               <a:rPr i="1" lang="en-GB">
@@ -1990,7 +2054,23 @@
                   <a:schemeClr val="dk1"/>
                 </a:solidFill>
               </a:rPr>
-              <a:t> is just as important. We are completely deferring live API write-paths to the 20-year-old database under OPP-04. Instead, the portal will batch data into a daily midnight CSV dropped via a secure, read-only SFTP file sync. This delivers full automation to operations without risking a catastrophic legacy system crash.</a:t>
+              <a:t> in phase 1 is also important. We are deferring live API write-paths to the 20-year-old database under OPP-04. Instead, the portal will batch data into a daily midnight CSV, dropped via a secure, read-only SFTP file sync. This delivers full automation to operations without risking a catastrophic </a:t>
+            </a:r>
+            <a:r>
+              <a:rPr lang="en-GB">
+                <a:solidFill>
+                  <a:schemeClr val="dk1"/>
+                </a:solidFill>
+              </a:rPr>
+              <a:t>crash</a:t>
+            </a:r>
+            <a:r>
+              <a:rPr lang="en-GB">
+                <a:solidFill>
+                  <a:schemeClr val="dk1"/>
+                </a:solidFill>
+              </a:rPr>
+              <a:t> of the legacy system.</a:t>
             </a:r>
             <a:endParaRPr>
               <a:solidFill>
@@ -2117,7 +2197,15 @@
             </a:pPr>
             <a:r>
               <a:rPr lang="en-GB"/>
-              <a:t>We aren't asking you to fund an abstract slide deck today. As you can see by the UI interface displayed on this slide, we have already developed a fully functional, low-fidelity HTML/CSS prototype to de-risk the build.</a:t>
+              <a:t>As you can see by the UI interface displayed on this slide, we have already developed a fully functional, low-fidelity HTML prototype to explore the </a:t>
+            </a:r>
+            <a:r>
+              <a:rPr lang="en-GB"/>
+              <a:t>capabilities</a:t>
+            </a:r>
+            <a:r>
+              <a:rPr lang="en-GB"/>
+              <a:t> of phase 1.</a:t>
             </a:r>
             <a:endParaRPr/>
           </a:p>
@@ -2141,7 +2229,7 @@
             </a:pPr>
             <a:r>
               <a:rPr lang="en-GB"/>
-              <a:t>This prototype visually proves that our core user journeys and exception guardrails work seamlessly in practice. The income validation checkbox and automated agent-routing rules are already mapped out. Furthermore, our product backlog is mature; all primary pathways are documented as engineering-ready user stories. The engineering team can commence development the exact day we receive budget sign-off.</a:t>
+              <a:t>This prototype proves that our core user journeys and exception guardrails work in practice. The income validation checkbox and automated agent-routing rules are already mapped out. Furthermore, all primary pathways are documented as engineering-ready user stories in our backlog. The engineering team can begin development the day we receive budget sign-off.</a:t>
             </a:r>
             <a:endParaRPr/>
           </a:p>
@@ -2268,7 +2356,7 @@
                   <a:schemeClr val="dk1"/>
                 </a:solidFill>
               </a:rPr>
-              <a:t>Before we ask for formal approval, let’s talk openly about risk mitigation.</a:t>
+              <a:t>Before we ask for formal approval, let’s talk about risk mitigation.</a:t>
             </a:r>
             <a:endParaRPr b="1">
               <a:solidFill>
@@ -2332,7 +2420,7 @@
                   <a:schemeClr val="dk1"/>
                 </a:solidFill>
               </a:rPr>
-              <a:t>Finally, to mitigate any vulnerability or customer hardship risks, the frontend includes automated safety valves. If a customer flags distress, the portal instantly bypasses automated calculations and drops them into a priority manual queue with explicit context strings, ensuring we maintain absolute empathy and regulatory alignment.</a:t>
+              <a:t>Finally, to mitigate any vulnerability or customer hardship risks, the frontend includes automated safety valves. If a customer flags distress, the portal instantly bypasses automated calculations and drops them into a priority manual queue with context provided, ensuring regulatory alignment.</a:t>
             </a:r>
             <a:endParaRPr>
               <a:solidFill>
@@ -10427,7 +10515,7 @@
             <a:tbl>
               <a:tblPr>
                 <a:noFill/>
-                <a:tableStyleId>{D5EEB3CE-D345-4858-9128-625A2702FB0C}</a:tableStyleId>
+                <a:tableStyleId>{0959A7C4-8D97-4529-8450-EA043DCB2C23}</a:tableStyleId>
               </a:tblPr>
               <a:tblGrid>
                 <a:gridCol w="1266825"/>
@@ -16119,6 +16207,285 @@
 </file>
 
 <file path=ppt/theme/theme1.xml><?xml version="1.0" encoding="utf-8"?>
+<a:theme xmlns:a="http://schemas.openxmlformats.org/drawingml/2006/main" xmlns:r="http://schemas.openxmlformats.org/officeDocument/2006/relationships" name="Simple Light">
+  <a:themeElements>
+    <a:clrScheme name="Simple Light">
+      <a:dk1>
+        <a:srgbClr val="000000"/>
+      </a:dk1>
+      <a:lt1>
+        <a:srgbClr val="FFFFFF"/>
+      </a:lt1>
+      <a:dk2>
+        <a:srgbClr val="595959"/>
+      </a:dk2>
+      <a:lt2>
+        <a:srgbClr val="EEEEEE"/>
+      </a:lt2>
+      <a:accent1>
+        <a:srgbClr val="4285F4"/>
+      </a:accent1>
+      <a:accent2>
+        <a:srgbClr val="212121"/>
+      </a:accent2>
+      <a:accent3>
+        <a:srgbClr val="78909C"/>
+      </a:accent3>
+      <a:accent4>
+        <a:srgbClr val="FFAB40"/>
+      </a:accent4>
+      <a:accent5>
+        <a:srgbClr val="0097A7"/>
+      </a:accent5>
+      <a:accent6>
+        <a:srgbClr val="EEFF41"/>
+      </a:accent6>
+      <a:hlink>
+        <a:srgbClr val="0097A7"/>
+      </a:hlink>
+      <a:folHlink>
+        <a:srgbClr val="0097A7"/>
+      </a:folHlink>
+    </a:clrScheme>
+    <a:fontScheme name="Office">
+      <a:majorFont>
+        <a:latin typeface="Arial"/>
+        <a:ea typeface=""/>
+        <a:cs typeface=""/>
+        <a:font script="Jpan" typeface="ＭＳ Ｐゴシック"/>
+        <a:font script="Hang" typeface="맑은 고딕"/>
+        <a:font script="Hans" typeface="宋体"/>
+        <a:font script="Hant" typeface="新細明體"/>
+        <a:font script="Arab" typeface="Times New Roman"/>
+        <a:font script="Hebr" typeface="Times New Roman"/>
+        <a:font script="Thai" typeface="Angsana New"/>
+        <a:font script="Ethi" typeface="Nyala"/>
+        <a:font script="Beng" typeface="Vrinda"/>
+        <a:font script="Gujr" typeface="Shruti"/>
+        <a:font script="Khmr" typeface="MoolBoran"/>
+        <a:font script="Knda" typeface="Tunga"/>
+        <a:font script="Guru" typeface="Raavi"/>
+        <a:font script="Cans" typeface="Euphemia"/>
+        <a:font script="Cher" typeface="Plantagenet Cherokee"/>
+        <a:font script="Yiii" typeface="Microsoft Yi Baiti"/>
+        <a:font script="Tibt" typeface="Microsoft Himalaya"/>
+        <a:font script="Thaa" typeface="MV Boli"/>
+        <a:font script="Deva" typeface="Mangal"/>
+        <a:font script="Telu" typeface="Gautami"/>
+        <a:font script="Taml" typeface="Latha"/>
+        <a:font script="Syrc" typeface="Estrangelo Edessa"/>
+        <a:font script="Orya" typeface="Kalinga"/>
+        <a:font script="Mlym" typeface="Kartika"/>
+        <a:font script="Laoo" typeface="DokChampa"/>
+        <a:font script="Sinh" typeface="Iskoola Pota"/>
+        <a:font script="Mong" typeface="Mongolian Baiti"/>
+        <a:font script="Viet" typeface="Times New Roman"/>
+        <a:font script="Uigh" typeface="Microsoft Uighur"/>
+        <a:font script="Geor" typeface="Sylfaen"/>
+      </a:majorFont>
+      <a:minorFont>
+        <a:latin typeface="Arial"/>
+        <a:ea typeface=""/>
+        <a:cs typeface=""/>
+        <a:font script="Jpan" typeface="ＭＳ Ｐゴシック"/>
+        <a:font script="Hang" typeface="맑은 고딕"/>
+        <a:font script="Hans" typeface="宋体"/>
+        <a:font script="Hant" typeface="新細明體"/>
+        <a:font script="Arab" typeface="Arial"/>
+        <a:font script="Hebr" typeface="Arial"/>
+        <a:font script="Thai" typeface="Cordia New"/>
+        <a:font script="Ethi" typeface="Nyala"/>
+        <a:font script="Beng" typeface="Vrinda"/>
+        <a:font script="Gujr" typeface="Shruti"/>
+        <a:font script="Khmr" typeface="DaunPenh"/>
+        <a:font script="Knda" typeface="Tunga"/>
+        <a:font script="Guru" typeface="Raavi"/>
+        <a:font script="Cans" typeface="Euphemia"/>
+        <a:font script="Cher" typeface="Plantagenet Cherokee"/>
+        <a:font script="Yiii" typeface="Microsoft Yi Baiti"/>
+        <a:font script="Tibt" typeface="Microsoft Himalaya"/>
+        <a:font script="Thaa" typeface="MV Boli"/>
+        <a:font script="Deva" typeface="Mangal"/>
+        <a:font script="Telu" typeface="Gautami"/>
+        <a:font script="Taml" typeface="Latha"/>
+        <a:font script="Syrc" typeface="Estrangelo Edessa"/>
+        <a:font script="Orya" typeface="Kalinga"/>
+        <a:font script="Mlym" typeface="Kartika"/>
+        <a:font script="Laoo" typeface="DokChampa"/>
+        <a:font script="Sinh" typeface="Iskoola Pota"/>
+        <a:font script="Mong" typeface="Mongolian Baiti"/>
+        <a:font script="Viet" typeface="Arial"/>
+        <a:font script="Uigh" typeface="Microsoft Uighur"/>
+        <a:font script="Geor" typeface="Sylfaen"/>
+      </a:minorFont>
+    </a:fontScheme>
+    <a:fmtScheme name="Office">
+      <a:fillStyleLst>
+        <a:solidFill>
+          <a:schemeClr val="phClr"/>
+        </a:solidFill>
+        <a:gradFill rotWithShape="1">
+          <a:gsLst>
+            <a:gs pos="0">
+              <a:schemeClr val="phClr">
+                <a:tint val="50000"/>
+                <a:satMod val="300000"/>
+              </a:schemeClr>
+            </a:gs>
+            <a:gs pos="35000">
+              <a:schemeClr val="phClr">
+                <a:tint val="37000"/>
+                <a:satMod val="300000"/>
+              </a:schemeClr>
+            </a:gs>
+            <a:gs pos="100000">
+              <a:schemeClr val="phClr">
+                <a:tint val="15000"/>
+                <a:satMod val="350000"/>
+              </a:schemeClr>
+            </a:gs>
+          </a:gsLst>
+          <a:lin ang="16200000" scaled="1"/>
+        </a:gradFill>
+        <a:gradFill rotWithShape="1">
+          <a:gsLst>
+            <a:gs pos="0">
+              <a:schemeClr val="phClr">
+                <a:tint val="100000"/>
+                <a:shade val="100000"/>
+                <a:satMod val="130000"/>
+              </a:schemeClr>
+            </a:gs>
+            <a:gs pos="100000">
+              <a:schemeClr val="phClr">
+                <a:tint val="50000"/>
+                <a:shade val="100000"/>
+                <a:satMod val="350000"/>
+              </a:schemeClr>
+            </a:gs>
+          </a:gsLst>
+          <a:lin ang="16200000" scaled="0"/>
+        </a:gradFill>
+      </a:fillStyleLst>
+      <a:lnStyleLst>
+        <a:ln w="9525" cap="flat" cmpd="sng" algn="ctr">
+          <a:solidFill>
+            <a:schemeClr val="phClr">
+              <a:shade val="95000"/>
+              <a:satMod val="105000"/>
+            </a:schemeClr>
+          </a:solidFill>
+          <a:prstDash val="solid"/>
+        </a:ln>
+        <a:ln w="25400" cap="flat" cmpd="sng" algn="ctr">
+          <a:solidFill>
+            <a:schemeClr val="phClr"/>
+          </a:solidFill>
+          <a:prstDash val="solid"/>
+        </a:ln>
+        <a:ln w="38100" cap="flat" cmpd="sng" algn="ctr">
+          <a:solidFill>
+            <a:schemeClr val="phClr"/>
+          </a:solidFill>
+          <a:prstDash val="solid"/>
+        </a:ln>
+      </a:lnStyleLst>
+      <a:effectStyleLst>
+        <a:effectStyle>
+          <a:effectLst>
+            <a:outerShdw blurRad="40000" dist="20000" dir="5400000" rotWithShape="0">
+              <a:srgbClr val="000000">
+                <a:alpha val="38000"/>
+              </a:srgbClr>
+            </a:outerShdw>
+          </a:effectLst>
+        </a:effectStyle>
+        <a:effectStyle>
+          <a:effectLst>
+            <a:outerShdw blurRad="40000" dist="23000" dir="5400000" rotWithShape="0">
+              <a:srgbClr val="000000">
+                <a:alpha val="35000"/>
+              </a:srgbClr>
+            </a:outerShdw>
+          </a:effectLst>
+        </a:effectStyle>
+        <a:effectStyle>
+          <a:effectLst>
+            <a:outerShdw blurRad="40000" dist="23000" dir="5400000" rotWithShape="0">
+              <a:srgbClr val="000000">
+                <a:alpha val="35000"/>
+              </a:srgbClr>
+            </a:outerShdw>
+          </a:effectLst>
+          <a:scene3d>
+            <a:camera prst="orthographicFront">
+              <a:rot lat="0" lon="0" rev="0"/>
+            </a:camera>
+            <a:lightRig rig="threePt" dir="t">
+              <a:rot lat="0" lon="0" rev="1200000"/>
+            </a:lightRig>
+          </a:scene3d>
+          <a:sp3d>
+            <a:bevelT w="63500" h="25400"/>
+          </a:sp3d>
+        </a:effectStyle>
+      </a:effectStyleLst>
+      <a:bgFillStyleLst>
+        <a:solidFill>
+          <a:schemeClr val="phClr"/>
+        </a:solidFill>
+        <a:gradFill rotWithShape="1">
+          <a:gsLst>
+            <a:gs pos="0">
+              <a:schemeClr val="phClr">
+                <a:tint val="40000"/>
+                <a:satMod val="350000"/>
+              </a:schemeClr>
+            </a:gs>
+            <a:gs pos="40000">
+              <a:schemeClr val="phClr">
+                <a:tint val="45000"/>
+                <a:shade val="99000"/>
+                <a:satMod val="350000"/>
+              </a:schemeClr>
+            </a:gs>
+            <a:gs pos="100000">
+              <a:schemeClr val="phClr">
+                <a:shade val="20000"/>
+                <a:satMod val="255000"/>
+              </a:schemeClr>
+            </a:gs>
+          </a:gsLst>
+          <a:path path="circle">
+            <a:fillToRect l="50000" t="-80000" r="50000" b="180000"/>
+          </a:path>
+        </a:gradFill>
+        <a:gradFill rotWithShape="1">
+          <a:gsLst>
+            <a:gs pos="0">
+              <a:schemeClr val="phClr">
+                <a:tint val="80000"/>
+                <a:satMod val="300000"/>
+              </a:schemeClr>
+            </a:gs>
+            <a:gs pos="100000">
+              <a:schemeClr val="phClr">
+                <a:shade val="30000"/>
+                <a:satMod val="200000"/>
+              </a:schemeClr>
+            </a:gs>
+          </a:gsLst>
+          <a:path path="circle">
+            <a:fillToRect l="50000" t="50000" r="50000" b="50000"/>
+          </a:path>
+        </a:gradFill>
+      </a:bgFillStyleLst>
+    </a:fmtScheme>
+  </a:themeElements>
+</a:theme>
+</file>
+
+<file path=ppt/theme/theme2.xml><?xml version="1.0" encoding="utf-8"?>
 <a:theme xmlns:a="http://schemas.openxmlformats.org/drawingml/2006/main" xmlns:r="http://schemas.openxmlformats.org/officeDocument/2006/relationships">
   <a:themeElements>
     <a:clrScheme name="Default">
@@ -16395,283 +16762,4 @@
     </a:fmtScheme>
   </a:themeElements>
 </a:theme>
-</file>
-
-<file path=ppt/theme/theme2.xml><?xml version="1.0" encoding="utf-8"?>
-<a:theme xmlns:a="http://schemas.openxmlformats.org/drawingml/2006/main" xmlns:r="http://schemas.openxmlformats.org/officeDocument/2006/relationships" name="Simple Light">
-  <a:themeElements>
-    <a:clrScheme name="Simple Light">
-      <a:dk1>
-        <a:srgbClr val="000000"/>
-      </a:dk1>
-      <a:lt1>
-        <a:srgbClr val="FFFFFF"/>
-      </a:lt1>
-      <a:dk2>
-        <a:srgbClr val="595959"/>
-      </a:dk2>
-      <a:lt2>
-        <a:srgbClr val="EEEEEE"/>
-      </a:lt2>
-      <a:accent1>
-        <a:srgbClr val="4285F4"/>
-      </a:accent1>
-      <a:accent2>
-        <a:srgbClr val="212121"/>
-      </a:accent2>
-      <a:accent3>
-        <a:srgbClr val="78909C"/>
-      </a:accent3>
-      <a:accent4>
-        <a:srgbClr val="FFAB40"/>
-      </a:accent4>
-      <a:accent5>
-        <a:srgbClr val="0097A7"/>
-      </a:accent5>
-      <a:accent6>
-        <a:srgbClr val="EEFF41"/>
-      </a:accent6>
-      <a:hlink>
-        <a:srgbClr val="0097A7"/>
-      </a:hlink>
-      <a:folHlink>
-        <a:srgbClr val="0097A7"/>
-      </a:folHlink>
-    </a:clrScheme>
-    <a:fontScheme name="Office">
-      <a:majorFont>
-        <a:latin typeface="Arial"/>
-        <a:ea typeface=""/>
-        <a:cs typeface=""/>
-        <a:font script="Jpan" typeface="ＭＳ Ｐゴシック"/>
-        <a:font script="Hang" typeface="맑은 고딕"/>
-        <a:font script="Hans" typeface="宋体"/>
-        <a:font script="Hant" typeface="新細明體"/>
-        <a:font script="Arab" typeface="Times New Roman"/>
-        <a:font script="Hebr" typeface="Times New Roman"/>
-        <a:font script="Thai" typeface="Angsana New"/>
-        <a:font script="Ethi" typeface="Nyala"/>
-        <a:font script="Beng" typeface="Vrinda"/>
-        <a:font script="Gujr" typeface="Shruti"/>
-        <a:font script="Khmr" typeface="MoolBoran"/>
-        <a:font script="Knda" typeface="Tunga"/>
-        <a:font script="Guru" typeface="Raavi"/>
-        <a:font script="Cans" typeface="Euphemia"/>
-        <a:font script="Cher" typeface="Plantagenet Cherokee"/>
-        <a:font script="Yiii" typeface="Microsoft Yi Baiti"/>
-        <a:font script="Tibt" typeface="Microsoft Himalaya"/>
-        <a:font script="Thaa" typeface="MV Boli"/>
-        <a:font script="Deva" typeface="Mangal"/>
-        <a:font script="Telu" typeface="Gautami"/>
-        <a:font script="Taml" typeface="Latha"/>
-        <a:font script="Syrc" typeface="Estrangelo Edessa"/>
-        <a:font script="Orya" typeface="Kalinga"/>
-        <a:font script="Mlym" typeface="Kartika"/>
-        <a:font script="Laoo" typeface="DokChampa"/>
-        <a:font script="Sinh" typeface="Iskoola Pota"/>
-        <a:font script="Mong" typeface="Mongolian Baiti"/>
-        <a:font script="Viet" typeface="Times New Roman"/>
-        <a:font script="Uigh" typeface="Microsoft Uighur"/>
-        <a:font script="Geor" typeface="Sylfaen"/>
-      </a:majorFont>
-      <a:minorFont>
-        <a:latin typeface="Arial"/>
-        <a:ea typeface=""/>
-        <a:cs typeface=""/>
-        <a:font script="Jpan" typeface="ＭＳ Ｐゴシック"/>
-        <a:font script="Hang" typeface="맑은 고딕"/>
-        <a:font script="Hans" typeface="宋体"/>
-        <a:font script="Hant" typeface="新細明體"/>
-        <a:font script="Arab" typeface="Arial"/>
-        <a:font script="Hebr" typeface="Arial"/>
-        <a:font script="Thai" typeface="Cordia New"/>
-        <a:font script="Ethi" typeface="Nyala"/>
-        <a:font script="Beng" typeface="Vrinda"/>
-        <a:font script="Gujr" typeface="Shruti"/>
-        <a:font script="Khmr" typeface="DaunPenh"/>
-        <a:font script="Knda" typeface="Tunga"/>
-        <a:font script="Guru" typeface="Raavi"/>
-        <a:font script="Cans" typeface="Euphemia"/>
-        <a:font script="Cher" typeface="Plantagenet Cherokee"/>
-        <a:font script="Yiii" typeface="Microsoft Yi Baiti"/>
-        <a:font script="Tibt" typeface="Microsoft Himalaya"/>
-        <a:font script="Thaa" typeface="MV Boli"/>
-        <a:font script="Deva" typeface="Mangal"/>
-        <a:font script="Telu" typeface="Gautami"/>
-        <a:font script="Taml" typeface="Latha"/>
-        <a:font script="Syrc" typeface="Estrangelo Edessa"/>
-        <a:font script="Orya" typeface="Kalinga"/>
-        <a:font script="Mlym" typeface="Kartika"/>
-        <a:font script="Laoo" typeface="DokChampa"/>
-        <a:font script="Sinh" typeface="Iskoola Pota"/>
-        <a:font script="Mong" typeface="Mongolian Baiti"/>
-        <a:font script="Viet" typeface="Arial"/>
-        <a:font script="Uigh" typeface="Microsoft Uighur"/>
-        <a:font script="Geor" typeface="Sylfaen"/>
-      </a:minorFont>
-    </a:fontScheme>
-    <a:fmtScheme name="Office">
-      <a:fillStyleLst>
-        <a:solidFill>
-          <a:schemeClr val="phClr"/>
-        </a:solidFill>
-        <a:gradFill rotWithShape="1">
-          <a:gsLst>
-            <a:gs pos="0">
-              <a:schemeClr val="phClr">
-                <a:tint val="50000"/>
-                <a:satMod val="300000"/>
-              </a:schemeClr>
-            </a:gs>
-            <a:gs pos="35000">
-              <a:schemeClr val="phClr">
-                <a:tint val="37000"/>
-                <a:satMod val="300000"/>
-              </a:schemeClr>
-            </a:gs>
-            <a:gs pos="100000">
-              <a:schemeClr val="phClr">
-                <a:tint val="15000"/>
-                <a:satMod val="350000"/>
-              </a:schemeClr>
-            </a:gs>
-          </a:gsLst>
-          <a:lin ang="16200000" scaled="1"/>
-        </a:gradFill>
-        <a:gradFill rotWithShape="1">
-          <a:gsLst>
-            <a:gs pos="0">
-              <a:schemeClr val="phClr">
-                <a:tint val="100000"/>
-                <a:shade val="100000"/>
-                <a:satMod val="130000"/>
-              </a:schemeClr>
-            </a:gs>
-            <a:gs pos="100000">
-              <a:schemeClr val="phClr">
-                <a:tint val="50000"/>
-                <a:shade val="100000"/>
-                <a:satMod val="350000"/>
-              </a:schemeClr>
-            </a:gs>
-          </a:gsLst>
-          <a:lin ang="16200000" scaled="0"/>
-        </a:gradFill>
-      </a:fillStyleLst>
-      <a:lnStyleLst>
-        <a:ln w="9525" cap="flat" cmpd="sng" algn="ctr">
-          <a:solidFill>
-            <a:schemeClr val="phClr">
-              <a:shade val="95000"/>
-              <a:satMod val="105000"/>
-            </a:schemeClr>
-          </a:solidFill>
-          <a:prstDash val="solid"/>
-        </a:ln>
-        <a:ln w="25400" cap="flat" cmpd="sng" algn="ctr">
-          <a:solidFill>
-            <a:schemeClr val="phClr"/>
-          </a:solidFill>
-          <a:prstDash val="solid"/>
-        </a:ln>
-        <a:ln w="38100" cap="flat" cmpd="sng" algn="ctr">
-          <a:solidFill>
-            <a:schemeClr val="phClr"/>
-          </a:solidFill>
-          <a:prstDash val="solid"/>
-        </a:ln>
-      </a:lnStyleLst>
-      <a:effectStyleLst>
-        <a:effectStyle>
-          <a:effectLst>
-            <a:outerShdw blurRad="40000" dist="20000" dir="5400000" rotWithShape="0">
-              <a:srgbClr val="000000">
-                <a:alpha val="38000"/>
-              </a:srgbClr>
-            </a:outerShdw>
-          </a:effectLst>
-        </a:effectStyle>
-        <a:effectStyle>
-          <a:effectLst>
-            <a:outerShdw blurRad="40000" dist="23000" dir="5400000" rotWithShape="0">
-              <a:srgbClr val="000000">
-                <a:alpha val="35000"/>
-              </a:srgbClr>
-            </a:outerShdw>
-          </a:effectLst>
-        </a:effectStyle>
-        <a:effectStyle>
-          <a:effectLst>
-            <a:outerShdw blurRad="40000" dist="23000" dir="5400000" rotWithShape="0">
-              <a:srgbClr val="000000">
-                <a:alpha val="35000"/>
-              </a:srgbClr>
-            </a:outerShdw>
-          </a:effectLst>
-          <a:scene3d>
-            <a:camera prst="orthographicFront">
-              <a:rot lat="0" lon="0" rev="0"/>
-            </a:camera>
-            <a:lightRig rig="threePt" dir="t">
-              <a:rot lat="0" lon="0" rev="1200000"/>
-            </a:lightRig>
-          </a:scene3d>
-          <a:sp3d>
-            <a:bevelT w="63500" h="25400"/>
-          </a:sp3d>
-        </a:effectStyle>
-      </a:effectStyleLst>
-      <a:bgFillStyleLst>
-        <a:solidFill>
-          <a:schemeClr val="phClr"/>
-        </a:solidFill>
-        <a:gradFill rotWithShape="1">
-          <a:gsLst>
-            <a:gs pos="0">
-              <a:schemeClr val="phClr">
-                <a:tint val="40000"/>
-                <a:satMod val="350000"/>
-              </a:schemeClr>
-            </a:gs>
-            <a:gs pos="40000">
-              <a:schemeClr val="phClr">
-                <a:tint val="45000"/>
-                <a:shade val="99000"/>
-                <a:satMod val="350000"/>
-              </a:schemeClr>
-            </a:gs>
-            <a:gs pos="100000">
-              <a:schemeClr val="phClr">
-                <a:shade val="20000"/>
-                <a:satMod val="255000"/>
-              </a:schemeClr>
-            </a:gs>
-          </a:gsLst>
-          <a:path path="circle">
-            <a:fillToRect l="50000" t="-80000" r="50000" b="180000"/>
-          </a:path>
-        </a:gradFill>
-        <a:gradFill rotWithShape="1">
-          <a:gsLst>
-            <a:gs pos="0">
-              <a:schemeClr val="phClr">
-                <a:tint val="80000"/>
-                <a:satMod val="300000"/>
-              </a:schemeClr>
-            </a:gs>
-            <a:gs pos="100000">
-              <a:schemeClr val="phClr">
-                <a:shade val="30000"/>
-                <a:satMod val="200000"/>
-              </a:schemeClr>
-            </a:gs>
-          </a:gsLst>
-          <a:path path="circle">
-            <a:fillToRect l="50000" t="50000" r="50000" b="50000"/>
-          </a:path>
-        </a:gradFill>
-      </a:bgFillStyleLst>
-    </a:fmtScheme>
-  </a:themeElements>
-</a:theme>
 </file>